--- a/Pregrado/Creatividad y pensamiento innovador/Clases/Sesion 05 - Validación de la propuesta · vigilancia tecnológica/Presentacion.pptx
+++ b/Pregrado/Creatividad y pensamiento innovador/Clases/Sesion 05 - Validación de la propuesta · vigilancia tecnológica/Presentacion.pptx
@@ -32,6 +32,7 @@
     <p:sldId id="280" r:id="rId31"/>
     <p:sldId id="281" r:id="rId32"/>
     <p:sldId id="282" r:id="rId33"/>
+    <p:sldId id="283" r:id="rId34"/>
   </p:sldIdLst>
   <p:sldSz cx="12191695" cy="6858000" type="screen4x3"/>
   <p:notesSz cx="6858000" cy="9144000"/>
@@ -10956,7 +10957,7 @@
                 </a:solidFill>
                 <a:latin typeface="Calibri"/>
               </a:rPr>
-              <a:t>TALLER — Validar por dentro y por fuera (25 minutos)</a:t>
+              <a:t>TALLER · Validar por dentro y por fuera</a:t>
             </a:r>
           </a:p>
         </p:txBody>
@@ -10969,8 +10970,8 @@
         </p:nvSpPr>
         <p:spPr>
           <a:xfrm>
-            <a:off x="640080" y="1691639"/>
-            <a:ext cx="10911535" cy="4617720"/>
+            <a:off x="640080" y="1280160"/>
+            <a:ext cx="10911535" cy="411480"/>
           </a:xfrm>
           <a:prstGeom prst="rect">
             <a:avLst/>
@@ -10983,6 +10984,77 @@
           </a:bodyPr>
           <a:lstStyle/>
           <a:p>
+            <a:pPr algn="ctr"/>
+            <a:r>
+              <a:rPr sz="1500" b="0" i="0">
+                <a:solidFill>
+                  <a:srgbClr val="2B2B2B"/>
+                </a:solidFill>
+                <a:latin typeface="Calibri"/>
+              </a:rPr>
+              <a:t>Individual · dos personas comparten </a:t>
+            </a:r>
+            <a:r>
+              <a:rPr sz="1500" b="1" i="0">
+                <a:solidFill>
+                  <a:srgbClr val="2B2B2B"/>
+                </a:solidFill>
+                <a:latin typeface="Calibri"/>
+              </a:rPr>
+              <a:t>solo</a:t>
+            </a:r>
+            <a:r>
+              <a:rPr sz="1500" b="0" i="0">
+                <a:solidFill>
+                  <a:srgbClr val="2B2B2B"/>
+                </a:solidFill>
+                <a:latin typeface="Calibri"/>
+              </a:rPr>
+              <a:t> una implicación y </a:t>
+            </a:r>
+            <a:r>
+              <a:rPr sz="1500" b="1" i="0">
+                <a:solidFill>
+                  <a:srgbClr val="2B2B2B"/>
+                </a:solidFill>
+                <a:latin typeface="Calibri"/>
+              </a:rPr>
+              <a:t>solo</a:t>
+            </a:r>
+            <a:r>
+              <a:rPr sz="1500" b="0" i="0">
+                <a:solidFill>
+                  <a:srgbClr val="2B2B2B"/>
+                </a:solidFill>
+                <a:latin typeface="Calibri"/>
+              </a:rPr>
+              <a:t> su criterio de prueba</a:t>
+            </a:r>
+          </a:p>
+        </p:txBody>
+      </p:sp>
+      <p:sp>
+        <p:nvSpPr>
+          <p:cNvPr id="5" name="TextBox 4"/>
+          <p:cNvSpPr txBox="1"/>
+          <p:nvPr/>
+        </p:nvSpPr>
+        <p:spPr>
+          <a:xfrm>
+            <a:off x="640080" y="2011679"/>
+            <a:ext cx="10911535" cy="4297680"/>
+          </a:xfrm>
+          <a:prstGeom prst="rect">
+            <a:avLst/>
+          </a:prstGeom>
+          <a:noFill/>
+        </p:spPr>
+        <p:txBody>
+          <a:bodyPr wrap="square" anchor="t" lIns="0" rIns="0" tIns="0" bIns="0">
+            <a:spAutoFit/>
+          </a:bodyPr>
+          <a:lstStyle/>
+          <a:p>
             <a:pPr>
               <a:spcAft>
                 <a:spcPts val="1000"/>
@@ -11004,226 +11076,16 @@
                 </a:solidFill>
                 <a:latin typeface="Calibri"/>
               </a:rPr>
-              <a:t>Bloque A · Por dentro (13 min)</a:t>
-            </a:r>
-          </a:p>
-          <a:p>
-            <a:pPr lvl="1">
-              <a:spcAft>
-                <a:spcPts val="600"/>
-              </a:spcAft>
-            </a:pPr>
-            <a:r>
-              <a:rPr sz="1500" b="0" i="0">
-                <a:solidFill>
-                  <a:srgbClr val="2B2B2B"/>
-                </a:solidFill>
-                <a:latin typeface="Calibri"/>
-              </a:rPr>
-              <a:t>●   </a:t>
-            </a:r>
-            <a:r>
-              <a:rPr sz="1500" b="1" i="0">
-                <a:solidFill>
-                  <a:srgbClr val="2B2B2B"/>
-                </a:solidFill>
-                <a:latin typeface="Calibri"/>
-              </a:rPr>
-              <a:t>(1)</a:t>
-            </a:r>
-            <a:r>
-              <a:rPr sz="1500" b="0" i="0">
-                <a:solidFill>
-                  <a:srgbClr val="2B2B2B"/>
-                </a:solidFill>
-                <a:latin typeface="Calibri"/>
-              </a:rPr>
-              <a:t> FODA de </a:t>
-            </a:r>
-            <a:r>
-              <a:rPr sz="1500" b="1" i="0">
-                <a:solidFill>
-                  <a:srgbClr val="2B2B2B"/>
-                </a:solidFill>
-                <a:latin typeface="Calibri"/>
-              </a:rPr>
-              <a:t>máximo 6 bullets</a:t>
-            </a:r>
-            <a:r>
-              <a:rPr sz="1500" b="0" i="0">
-                <a:solidFill>
-                  <a:srgbClr val="2B2B2B"/>
-                </a:solidFill>
-                <a:latin typeface="Calibri"/>
-              </a:rPr>
-              <a:t>, todos verificables, con interna/externa bien separadas. </a:t>
-            </a:r>
-            <a:r>
-              <a:rPr sz="1500" b="1" i="0">
-                <a:solidFill>
-                  <a:srgbClr val="2B2B2B"/>
-                </a:solidFill>
-                <a:latin typeface="Calibri"/>
-              </a:rPr>
-              <a:t>(3 min)</a:t>
-            </a:r>
-          </a:p>
-          <a:p>
-            <a:pPr lvl="1">
-              <a:spcAft>
-                <a:spcPts val="600"/>
-              </a:spcAft>
-            </a:pPr>
-            <a:r>
-              <a:rPr sz="1500" b="0" i="0">
-                <a:solidFill>
-                  <a:srgbClr val="2B2B2B"/>
-                </a:solidFill>
-                <a:latin typeface="Calibri"/>
-              </a:rPr>
-              <a:t>●   </a:t>
-            </a:r>
-            <a:r>
-              <a:rPr sz="1500" b="1" i="0">
-                <a:solidFill>
-                  <a:srgbClr val="2B2B2B"/>
-                </a:solidFill>
-                <a:latin typeface="Calibri"/>
-              </a:rPr>
-              <a:t>(2)</a:t>
-            </a:r>
-            <a:r>
-              <a:rPr sz="1500" b="0" i="0">
-                <a:solidFill>
-                  <a:srgbClr val="2B2B2B"/>
-                </a:solidFill>
-                <a:latin typeface="Calibri"/>
-              </a:rPr>
-              <a:t> Canvas mínimo en Canvanizer: </a:t>
-            </a:r>
-            <a:r>
-              <a:rPr sz="1500" b="1" i="0">
-                <a:solidFill>
-                  <a:srgbClr val="2B2B2B"/>
-                </a:solidFill>
-                <a:latin typeface="Calibri"/>
-              </a:rPr>
-              <a:t>propuesta de valor, segmento, canales y actividades clave</a:t>
-            </a:r>
-            <a:r>
-              <a:rPr sz="1500" b="0" i="0">
-                <a:solidFill>
-                  <a:srgbClr val="2B2B2B"/>
-                </a:solidFill>
-                <a:latin typeface="Calibri"/>
-              </a:rPr>
-              <a:t>. </a:t>
-            </a:r>
-            <a:r>
-              <a:rPr sz="1500" b="1" i="0">
-                <a:solidFill>
-                  <a:srgbClr val="2B2B2B"/>
-                </a:solidFill>
-                <a:latin typeface="Calibri"/>
-              </a:rPr>
-              <a:t>(5 min)</a:t>
-            </a:r>
-          </a:p>
-          <a:p>
-            <a:pPr lvl="1">
-              <a:spcAft>
-                <a:spcPts val="600"/>
-              </a:spcAft>
-            </a:pPr>
-            <a:r>
-              <a:rPr sz="1500" b="0" i="0">
-                <a:solidFill>
-                  <a:srgbClr val="2B2B2B"/>
-                </a:solidFill>
-                <a:latin typeface="Calibri"/>
-              </a:rPr>
-              <a:t>●   </a:t>
-            </a:r>
-            <a:r>
-              <a:rPr sz="1500" b="1" i="0">
-                <a:solidFill>
-                  <a:srgbClr val="2B2B2B"/>
-                </a:solidFill>
-                <a:latin typeface="Calibri"/>
-              </a:rPr>
-              <a:t>(3)</a:t>
-            </a:r>
-            <a:r>
-              <a:rPr sz="1500" b="0" i="0">
-                <a:solidFill>
-                  <a:srgbClr val="2B2B2B"/>
-                </a:solidFill>
-                <a:latin typeface="Calibri"/>
-              </a:rPr>
-              <a:t> </a:t>
-            </a:r>
-            <a:r>
-              <a:rPr sz="1500" b="1" i="0">
-                <a:solidFill>
-                  <a:srgbClr val="2B2B2B"/>
-                </a:solidFill>
-                <a:latin typeface="Calibri"/>
-              </a:rPr>
-              <a:t>MVP en 5 líneas</a:t>
-            </a:r>
-            <a:r>
-              <a:rPr sz="1500" b="0" i="0">
-                <a:solidFill>
-                  <a:srgbClr val="2B2B2B"/>
-                </a:solidFill>
-                <a:latin typeface="Calibri"/>
-              </a:rPr>
-              <a:t> + </a:t>
-            </a:r>
-            <a:r>
-              <a:rPr sz="1500" b="1" i="0">
-                <a:solidFill>
-                  <a:srgbClr val="2B2B2B"/>
-                </a:solidFill>
-                <a:latin typeface="Calibri"/>
-              </a:rPr>
-              <a:t>una prueba</a:t>
-            </a:r>
-            <a:r>
-              <a:rPr sz="1500" b="0" i="0">
-                <a:solidFill>
-                  <a:srgbClr val="2B2B2B"/>
-                </a:solidFill>
-                <a:latin typeface="Calibri"/>
-              </a:rPr>
-              <a:t> de su supuesto más riesgoso con criterio </a:t>
-            </a:r>
-            <a:r>
-              <a:rPr sz="1500" b="1" i="0">
-                <a:solidFill>
-                  <a:srgbClr val="2B2B2B"/>
-                </a:solidFill>
-                <a:latin typeface="Calibri"/>
-              </a:rPr>
-              <a:t>numérico u observable</a:t>
-            </a:r>
-            <a:r>
-              <a:rPr sz="1500" b="0" i="0">
-                <a:solidFill>
-                  <a:srgbClr val="2B2B2B"/>
-                </a:solidFill>
-                <a:latin typeface="Calibri"/>
-              </a:rPr>
-              <a:t>. </a:t>
-            </a:r>
-            <a:r>
-              <a:rPr sz="1500" b="1" i="0">
-                <a:solidFill>
-                  <a:srgbClr val="2B2B2B"/>
-                </a:solidFill>
-                <a:latin typeface="Calibri"/>
-              </a:rPr>
-              <a:t>(5 min)</a:t>
+              <a:t>Al final tiene:</a:t>
+            </a:r>
+            <a:r>
+              <a:rPr sz="1600" b="0" i="0">
+                <a:solidFill>
+                  <a:srgbClr val="2B2B2B"/>
+                </a:solidFill>
+                <a:latin typeface="Calibri"/>
+              </a:rPr>
+              <a:t> FODA, Canvas mínimo, MVP con su prueba, dos fichas de señal y una decisión escrita.</a:t>
             </a:r>
           </a:p>
           <a:p>
@@ -11248,208 +11110,52 @@
                 </a:solidFill>
                 <a:latin typeface="Calibri"/>
               </a:rPr>
-              <a:t>Bloque B · Por fuera (12 min)</a:t>
-            </a:r>
-          </a:p>
-          <a:p>
-            <a:pPr lvl="1">
-              <a:spcAft>
-                <a:spcPts val="600"/>
-              </a:spcAft>
-            </a:pPr>
-            <a:r>
-              <a:rPr sz="1500" b="0" i="0">
-                <a:solidFill>
-                  <a:srgbClr val="2B2B2B"/>
-                </a:solidFill>
-                <a:latin typeface="Calibri"/>
-              </a:rPr>
-              <a:t>●   </a:t>
-            </a:r>
-            <a:r>
-              <a:rPr sz="1500" b="1" i="0">
-                <a:solidFill>
-                  <a:srgbClr val="2B2B2B"/>
-                </a:solidFill>
-                <a:latin typeface="Calibri"/>
-              </a:rPr>
-              <a:t>(4)</a:t>
-            </a:r>
-            <a:r>
-              <a:rPr sz="1500" b="0" i="0">
-                <a:solidFill>
-                  <a:srgbClr val="2B2B2B"/>
-                </a:solidFill>
-                <a:latin typeface="Calibri"/>
-              </a:rPr>
-              <a:t> Escriban la pregunta de vigilancia y busquen en Scholar y/o Patents. </a:t>
-            </a:r>
-            <a:r>
-              <a:rPr sz="1500" b="1" i="0">
-                <a:solidFill>
-                  <a:srgbClr val="2B2B2B"/>
-                </a:solidFill>
-                <a:latin typeface="Calibri"/>
-              </a:rPr>
-              <a:t>(5 min)</a:t>
-            </a:r>
-          </a:p>
-          <a:p>
-            <a:pPr lvl="1">
-              <a:spcAft>
-                <a:spcPts val="600"/>
-              </a:spcAft>
-            </a:pPr>
-            <a:r>
-              <a:rPr sz="1500" b="0" i="0">
-                <a:solidFill>
-                  <a:srgbClr val="2B2B2B"/>
-                </a:solidFill>
-                <a:latin typeface="Calibri"/>
-              </a:rPr>
-              <a:t>●   </a:t>
-            </a:r>
-            <a:r>
-              <a:rPr sz="1500" b="1" i="0">
-                <a:solidFill>
-                  <a:srgbClr val="2B2B2B"/>
-                </a:solidFill>
-                <a:latin typeface="Calibri"/>
-              </a:rPr>
-              <a:t>(5)</a:t>
-            </a:r>
-            <a:r>
-              <a:rPr sz="1500" b="0" i="0">
-                <a:solidFill>
-                  <a:srgbClr val="2B2B2B"/>
-                </a:solidFill>
-                <a:latin typeface="Calibri"/>
-              </a:rPr>
-              <a:t> </a:t>
-            </a:r>
-            <a:r>
-              <a:rPr sz="1500" b="1" i="0">
-                <a:solidFill>
-                  <a:srgbClr val="2B2B2B"/>
-                </a:solidFill>
-                <a:latin typeface="Calibri"/>
-              </a:rPr>
-              <a:t>Mínimo 2 fichas de señal</a:t>
-            </a:r>
-            <a:r>
-              <a:rPr sz="1500" b="0" i="0">
-                <a:solidFill>
-                  <a:srgbClr val="2B2B2B"/>
-                </a:solidFill>
-                <a:latin typeface="Calibri"/>
-              </a:rPr>
-              <a:t> —de </a:t>
-            </a:r>
-            <a:r>
-              <a:rPr sz="1500" b="1" i="0">
-                <a:solidFill>
-                  <a:srgbClr val="2B2B2B"/>
-                </a:solidFill>
-                <a:latin typeface="Calibri"/>
-              </a:rPr>
-              <a:t>frentes distintos</a:t>
-            </a:r>
-            <a:r>
-              <a:rPr sz="1500" b="0" i="0">
-                <a:solidFill>
-                  <a:srgbClr val="2B2B2B"/>
-                </a:solidFill>
-                <a:latin typeface="Calibri"/>
-              </a:rPr>
-              <a:t>, no las dos tecnológicas— con fuente, </a:t>
-            </a:r>
-            <a:r>
-              <a:rPr sz="1500" b="1" i="0">
-                <a:solidFill>
-                  <a:srgbClr val="2B2B2B"/>
-                </a:solidFill>
-                <a:latin typeface="Calibri"/>
-              </a:rPr>
-              <a:t>fecha</a:t>
-            </a:r>
-            <a:r>
-              <a:rPr sz="1500" b="0" i="0">
-                <a:solidFill>
-                  <a:srgbClr val="2B2B2B"/>
-                </a:solidFill>
-                <a:latin typeface="Calibri"/>
-              </a:rPr>
-              <a:t>, hallazgo, implicación y confianza. </a:t>
-            </a:r>
-            <a:r>
-              <a:rPr sz="1500" b="1" i="0">
-                <a:solidFill>
-                  <a:srgbClr val="2B2B2B"/>
-                </a:solidFill>
-                <a:latin typeface="Calibri"/>
-              </a:rPr>
-              <a:t>(5 min)</a:t>
-            </a:r>
-          </a:p>
-          <a:p>
-            <a:pPr lvl="1">
-              <a:spcAft>
-                <a:spcPts val="600"/>
-              </a:spcAft>
-            </a:pPr>
-            <a:r>
-              <a:rPr sz="1500" b="0" i="0">
-                <a:solidFill>
-                  <a:srgbClr val="2B2B2B"/>
-                </a:solidFill>
-                <a:latin typeface="Calibri"/>
-              </a:rPr>
-              <a:t>●   </a:t>
-            </a:r>
-            <a:r>
-              <a:rPr sz="1500" b="1" i="0">
-                <a:solidFill>
-                  <a:srgbClr val="2B2B2B"/>
-                </a:solidFill>
-                <a:latin typeface="Calibri"/>
-              </a:rPr>
-              <a:t>(6)</a:t>
-            </a:r>
-            <a:r>
-              <a:rPr sz="1500" b="0" i="0">
-                <a:solidFill>
-                  <a:srgbClr val="2B2B2B"/>
-                </a:solidFill>
-                <a:latin typeface="Calibri"/>
-              </a:rPr>
-              <a:t> Escriban abajo </a:t>
-            </a:r>
-            <a:r>
-              <a:rPr sz="1500" b="1" i="0">
-                <a:solidFill>
-                  <a:srgbClr val="2B2B2B"/>
-                </a:solidFill>
-                <a:latin typeface="Calibri"/>
-              </a:rPr>
-              <a:t>su decisión</a:t>
-            </a:r>
-            <a:r>
-              <a:rPr sz="1500" b="0" i="0">
-                <a:solidFill>
-                  <a:srgbClr val="2B2B2B"/>
-                </a:solidFill>
-                <a:latin typeface="Calibri"/>
-              </a:rPr>
-              <a:t> en una frase. </a:t>
-            </a:r>
-            <a:r>
-              <a:rPr sz="1500" b="1" i="0">
-                <a:solidFill>
-                  <a:srgbClr val="2B2B2B"/>
-                </a:solidFill>
-                <a:latin typeface="Calibri"/>
-              </a:rPr>
-              <a:t>(2 min)</a:t>
+              <a:t>Paso 1</a:t>
+            </a:r>
+            <a:r>
+              <a:rPr sz="1600" b="0" i="0">
+                <a:solidFill>
+                  <a:srgbClr val="2B2B2B"/>
+                </a:solidFill>
+                <a:latin typeface="Calibri"/>
+              </a:rPr>
+              <a:t> · </a:t>
+            </a:r>
+            <a:r>
+              <a:rPr sz="1600" b="1" i="0">
+                <a:solidFill>
+                  <a:srgbClr val="2B2B2B"/>
+                </a:solidFill>
+                <a:latin typeface="Calibri"/>
+              </a:rPr>
+              <a:t>Por dentro —</a:t>
+            </a:r>
+            <a:r>
+              <a:rPr sz="1600" b="0" i="0">
+                <a:solidFill>
+                  <a:srgbClr val="2B2B2B"/>
+                </a:solidFill>
+                <a:latin typeface="Calibri"/>
+              </a:rPr>
+              <a:t> FODA de </a:t>
+            </a:r>
+            <a:r>
+              <a:rPr sz="1600" b="1" i="0">
+                <a:solidFill>
+                  <a:srgbClr val="2B2B2B"/>
+                </a:solidFill>
+                <a:latin typeface="Calibri"/>
+              </a:rPr>
+              <a:t>máximo 6 viñetas</a:t>
+            </a:r>
+            <a:r>
+              <a:rPr sz="1600" b="0" i="0">
+                <a:solidFill>
+                  <a:srgbClr val="2B2B2B"/>
+                </a:solidFill>
+                <a:latin typeface="Calibri"/>
+              </a:rPr>
+              <a:t>, todas verificables, con interna y externa bien separadas.</a:t>
             </a:r>
           </a:p>
           <a:p>
@@ -11465,7 +11171,7 @@
                 </a:solidFill>
                 <a:latin typeface="Calibri"/>
               </a:rPr>
-              <a:t>–   Al final, </a:t>
+              <a:t>–   </a:t>
             </a:r>
             <a:r>
               <a:rPr sz="1600" b="1" i="0">
@@ -11474,7 +11180,7 @@
                 </a:solidFill>
                 <a:latin typeface="Calibri"/>
               </a:rPr>
-              <a:t>dos personas</a:t>
+              <a:t>Paso 2</a:t>
             </a:r>
             <a:r>
               <a:rPr sz="1600" b="0" i="0">
@@ -11483,7 +11189,7 @@
                 </a:solidFill>
                 <a:latin typeface="Calibri"/>
               </a:rPr>
-              <a:t> comparten </a:t>
+              <a:t> · </a:t>
             </a:r>
             <a:r>
               <a:rPr sz="1600" b="1" i="0">
@@ -11492,7 +11198,7 @@
                 </a:solidFill>
                 <a:latin typeface="Calibri"/>
               </a:rPr>
-              <a:t>solo la implicación</a:t>
+              <a:t>Por dentro —</a:t>
             </a:r>
             <a:r>
               <a:rPr sz="1600" b="0" i="0">
@@ -11501,7 +11207,7 @@
                 </a:solidFill>
                 <a:latin typeface="Calibri"/>
               </a:rPr>
-              <a:t> de una señal y </a:t>
+              <a:t> Canvas mínimo en Canvanizer: </a:t>
             </a:r>
             <a:r>
               <a:rPr sz="1600" b="1" i="0">
@@ -11510,7 +11216,7 @@
                 </a:solidFill>
                 <a:latin typeface="Calibri"/>
               </a:rPr>
-              <a:t>solo el criterio</a:t>
+              <a:t>propuesta de valor, segmento, canales y actividades clave</a:t>
             </a:r>
             <a:r>
               <a:rPr sz="1600" b="0" i="0">
@@ -11519,14 +11225,400 @@
                 </a:solidFill>
                 <a:latin typeface="Calibri"/>
               </a:rPr>
-              <a:t> de su prueba — no el documento completo.</a:t>
+              <a:t>. Hoy solo esos cuatro bloques.</a:t>
+            </a:r>
+          </a:p>
+          <a:p>
+            <a:pPr>
+              <a:spcAft>
+                <a:spcPts val="1000"/>
+              </a:spcAft>
+            </a:pPr>
+            <a:r>
+              <a:rPr sz="1600" b="0" i="0">
+                <a:solidFill>
+                  <a:srgbClr val="2B2B2B"/>
+                </a:solidFill>
+                <a:latin typeface="Calibri"/>
+              </a:rPr>
+              <a:t>–   </a:t>
+            </a:r>
+            <a:r>
+              <a:rPr sz="1600" b="1" i="0">
+                <a:solidFill>
+                  <a:srgbClr val="2B2B2B"/>
+                </a:solidFill>
+                <a:latin typeface="Calibri"/>
+              </a:rPr>
+              <a:t>Paso 3</a:t>
+            </a:r>
+            <a:r>
+              <a:rPr sz="1600" b="0" i="0">
+                <a:solidFill>
+                  <a:srgbClr val="2B2B2B"/>
+                </a:solidFill>
+                <a:latin typeface="Calibri"/>
+              </a:rPr>
+              <a:t> · </a:t>
+            </a:r>
+            <a:r>
+              <a:rPr sz="1600" b="1" i="0">
+                <a:solidFill>
+                  <a:srgbClr val="2B2B2B"/>
+                </a:solidFill>
+                <a:latin typeface="Calibri"/>
+              </a:rPr>
+              <a:t>Por dentro —</a:t>
+            </a:r>
+            <a:r>
+              <a:rPr sz="1600" b="0" i="0">
+                <a:solidFill>
+                  <a:srgbClr val="2B2B2B"/>
+                </a:solidFill>
+                <a:latin typeface="Calibri"/>
+              </a:rPr>
+              <a:t> </a:t>
+            </a:r>
+            <a:r>
+              <a:rPr sz="1600" b="1" i="0">
+                <a:solidFill>
+                  <a:srgbClr val="2B2B2B"/>
+                </a:solidFill>
+                <a:latin typeface="Calibri"/>
+              </a:rPr>
+              <a:t>MVP en 5 líneas</a:t>
+            </a:r>
+            <a:r>
+              <a:rPr sz="1600" b="0" i="0">
+                <a:solidFill>
+                  <a:srgbClr val="2B2B2B"/>
+                </a:solidFill>
+                <a:latin typeface="Calibri"/>
+              </a:rPr>
+              <a:t> más </a:t>
+            </a:r>
+            <a:r>
+              <a:rPr sz="1600" b="1" i="0">
+                <a:solidFill>
+                  <a:srgbClr val="2B2B2B"/>
+                </a:solidFill>
+                <a:latin typeface="Calibri"/>
+              </a:rPr>
+              <a:t>una prueba</a:t>
+            </a:r>
+            <a:r>
+              <a:rPr sz="1600" b="0" i="0">
+                <a:solidFill>
+                  <a:srgbClr val="2B2B2B"/>
+                </a:solidFill>
+                <a:latin typeface="Calibri"/>
+              </a:rPr>
+              <a:t> de su supuesto más riesgoso, con criterio </a:t>
+            </a:r>
+            <a:r>
+              <a:rPr sz="1600" b="1" i="0">
+                <a:solidFill>
+                  <a:srgbClr val="2B2B2B"/>
+                </a:solidFill>
+                <a:latin typeface="Calibri"/>
+              </a:rPr>
+              <a:t>numérico u observable</a:t>
+            </a:r>
+            <a:r>
+              <a:rPr sz="1600" b="0" i="0">
+                <a:solidFill>
+                  <a:srgbClr val="2B2B2B"/>
+                </a:solidFill>
+                <a:latin typeface="Calibri"/>
+              </a:rPr>
+              <a:t>.</a:t>
+            </a:r>
+          </a:p>
+          <a:p>
+            <a:pPr>
+              <a:spcAft>
+                <a:spcPts val="1000"/>
+              </a:spcAft>
+            </a:pPr>
+            <a:r>
+              <a:rPr sz="1600" b="0" i="0">
+                <a:solidFill>
+                  <a:srgbClr val="2B2B2B"/>
+                </a:solidFill>
+                <a:latin typeface="Calibri"/>
+              </a:rPr>
+              <a:t>–   </a:t>
+            </a:r>
+            <a:r>
+              <a:rPr sz="1600" b="1" i="0">
+                <a:solidFill>
+                  <a:srgbClr val="2B2B2B"/>
+                </a:solidFill>
+                <a:latin typeface="Calibri"/>
+              </a:rPr>
+              <a:t>Paso 4</a:t>
+            </a:r>
+            <a:r>
+              <a:rPr sz="1600" b="0" i="0">
+                <a:solidFill>
+                  <a:srgbClr val="2B2B2B"/>
+                </a:solidFill>
+                <a:latin typeface="Calibri"/>
+              </a:rPr>
+              <a:t> · </a:t>
+            </a:r>
+            <a:r>
+              <a:rPr sz="1600" b="1" i="0">
+                <a:solidFill>
+                  <a:srgbClr val="2B2B2B"/>
+                </a:solidFill>
+                <a:latin typeface="Calibri"/>
+              </a:rPr>
+              <a:t>Por fuera —</a:t>
+            </a:r>
+            <a:r>
+              <a:rPr sz="1600" b="0" i="0">
+                <a:solidFill>
+                  <a:srgbClr val="2B2B2B"/>
+                </a:solidFill>
+                <a:latin typeface="Calibri"/>
+              </a:rPr>
+              <a:t> escriba la pregunta de vigilancia y busque en Scholar y/o Patents.</a:t>
+            </a:r>
+          </a:p>
+          <a:p>
+            <a:pPr>
+              <a:spcAft>
+                <a:spcPts val="1000"/>
+              </a:spcAft>
+            </a:pPr>
+            <a:r>
+              <a:rPr sz="1600" b="0" i="0">
+                <a:solidFill>
+                  <a:srgbClr val="2B2B2B"/>
+                </a:solidFill>
+                <a:latin typeface="Calibri"/>
+              </a:rPr>
+              <a:t>–   </a:t>
+            </a:r>
+            <a:r>
+              <a:rPr sz="1600" b="1" i="0">
+                <a:solidFill>
+                  <a:srgbClr val="2B2B2B"/>
+                </a:solidFill>
+                <a:latin typeface="Calibri"/>
+              </a:rPr>
+              <a:t>Paso 5</a:t>
+            </a:r>
+            <a:r>
+              <a:rPr sz="1600" b="0" i="0">
+                <a:solidFill>
+                  <a:srgbClr val="2B2B2B"/>
+                </a:solidFill>
+                <a:latin typeface="Calibri"/>
+              </a:rPr>
+              <a:t> · </a:t>
+            </a:r>
+            <a:r>
+              <a:rPr sz="1600" b="1" i="0">
+                <a:solidFill>
+                  <a:srgbClr val="2B2B2B"/>
+                </a:solidFill>
+                <a:latin typeface="Calibri"/>
+              </a:rPr>
+              <a:t>Por fuera —</a:t>
+            </a:r>
+            <a:r>
+              <a:rPr sz="1600" b="0" i="0">
+                <a:solidFill>
+                  <a:srgbClr val="2B2B2B"/>
+                </a:solidFill>
+                <a:latin typeface="Calibri"/>
+              </a:rPr>
+              <a:t> </a:t>
+            </a:r>
+            <a:r>
+              <a:rPr sz="1600" b="1" i="0">
+                <a:solidFill>
+                  <a:srgbClr val="2B2B2B"/>
+                </a:solidFill>
+                <a:latin typeface="Calibri"/>
+              </a:rPr>
+              <a:t>mínimo 2 fichas de señal</a:t>
+            </a:r>
+            <a:r>
+              <a:rPr sz="1600" b="0" i="0">
+                <a:solidFill>
+                  <a:srgbClr val="2B2B2B"/>
+                </a:solidFill>
+                <a:latin typeface="Calibri"/>
+              </a:rPr>
+              <a:t> de </a:t>
+            </a:r>
+            <a:r>
+              <a:rPr sz="1600" b="1" i="0">
+                <a:solidFill>
+                  <a:srgbClr val="2B2B2B"/>
+                </a:solidFill>
+                <a:latin typeface="Calibri"/>
+              </a:rPr>
+              <a:t>frentes distintos</a:t>
+            </a:r>
+            <a:r>
+              <a:rPr sz="1600" b="0" i="0">
+                <a:solidFill>
+                  <a:srgbClr val="2B2B2B"/>
+                </a:solidFill>
+                <a:latin typeface="Calibri"/>
+              </a:rPr>
+              <a:t>, con fuente, </a:t>
+            </a:r>
+            <a:r>
+              <a:rPr sz="1600" b="1" i="0">
+                <a:solidFill>
+                  <a:srgbClr val="2B2B2B"/>
+                </a:solidFill>
+                <a:latin typeface="Calibri"/>
+              </a:rPr>
+              <a:t>fecha</a:t>
+            </a:r>
+            <a:r>
+              <a:rPr sz="1600" b="0" i="0">
+                <a:solidFill>
+                  <a:srgbClr val="2B2B2B"/>
+                </a:solidFill>
+                <a:latin typeface="Calibri"/>
+              </a:rPr>
+              <a:t>, hallazgo, implicación y confianza.</a:t>
+            </a:r>
+          </a:p>
+          <a:p>
+            <a:pPr>
+              <a:spcAft>
+                <a:spcPts val="1000"/>
+              </a:spcAft>
+            </a:pPr>
+            <a:r>
+              <a:rPr sz="1600" b="0" i="0">
+                <a:solidFill>
+                  <a:srgbClr val="2B2B2B"/>
+                </a:solidFill>
+                <a:latin typeface="Calibri"/>
+              </a:rPr>
+              <a:t>–   </a:t>
+            </a:r>
+            <a:r>
+              <a:rPr sz="1600" b="1" i="0">
+                <a:solidFill>
+                  <a:srgbClr val="2B2B2B"/>
+                </a:solidFill>
+                <a:latin typeface="Calibri"/>
+              </a:rPr>
+              <a:t>Paso 6</a:t>
+            </a:r>
+            <a:r>
+              <a:rPr sz="1600" b="0" i="0">
+                <a:solidFill>
+                  <a:srgbClr val="2B2B2B"/>
+                </a:solidFill>
+                <a:latin typeface="Calibri"/>
+              </a:rPr>
+              <a:t> · </a:t>
+            </a:r>
+            <a:r>
+              <a:rPr sz="1600" b="1" i="0">
+                <a:solidFill>
+                  <a:srgbClr val="2B2B2B"/>
+                </a:solidFill>
+                <a:latin typeface="Calibri"/>
+              </a:rPr>
+              <a:t>Por fuera —</a:t>
+            </a:r>
+            <a:r>
+              <a:rPr sz="1600" b="0" i="0">
+                <a:solidFill>
+                  <a:srgbClr val="2B2B2B"/>
+                </a:solidFill>
+                <a:latin typeface="Calibri"/>
+              </a:rPr>
+              <a:t> escriba abajo </a:t>
+            </a:r>
+            <a:r>
+              <a:rPr sz="1600" b="1" i="0">
+                <a:solidFill>
+                  <a:srgbClr val="2B2B2B"/>
+                </a:solidFill>
+                <a:latin typeface="Calibri"/>
+              </a:rPr>
+              <a:t>su decisión</a:t>
+            </a:r>
+            <a:r>
+              <a:rPr sz="1600" b="0" i="0">
+                <a:solidFill>
+                  <a:srgbClr val="2B2B2B"/>
+                </a:solidFill>
+                <a:latin typeface="Calibri"/>
+              </a:rPr>
+              <a:t> en una frase.</a:t>
+            </a:r>
+          </a:p>
+          <a:p>
+            <a:pPr>
+              <a:spcAft>
+                <a:spcPts val="1000"/>
+              </a:spcAft>
+            </a:pPr>
+            <a:r>
+              <a:rPr sz="1600" b="0" i="0">
+                <a:solidFill>
+                  <a:srgbClr val="2B2B2B"/>
+                </a:solidFill>
+                <a:latin typeface="Calibri"/>
+              </a:rPr>
+              <a:t>–   </a:t>
+            </a:r>
+            <a:r>
+              <a:rPr sz="1600" b="1" i="0">
+                <a:solidFill>
+                  <a:srgbClr val="2B2B2B"/>
+                </a:solidFill>
+                <a:latin typeface="Calibri"/>
+              </a:rPr>
+              <a:t>En clase, sin falta:</a:t>
+            </a:r>
+            <a:r>
+              <a:rPr sz="1600" b="0" i="0">
+                <a:solidFill>
+                  <a:srgbClr val="2B2B2B"/>
+                </a:solidFill>
+                <a:latin typeface="Calibri"/>
+              </a:rPr>
+              <a:t> los </a:t>
+            </a:r>
+            <a:r>
+              <a:rPr sz="1600" b="1" i="0">
+                <a:solidFill>
+                  <a:srgbClr val="2B2B2B"/>
+                </a:solidFill>
+                <a:latin typeface="Calibri"/>
+              </a:rPr>
+              <a:t>pasos 1 a 3</a:t>
+            </a:r>
+            <a:r>
+              <a:rPr sz="1600" b="0" i="0">
+                <a:solidFill>
+                  <a:srgbClr val="2B2B2B"/>
+                </a:solidFill>
+                <a:latin typeface="Calibri"/>
+              </a:rPr>
+              <a:t>. Del 4 en adelante puede quedar en trabajo autónomo, pero antes de la próxima sesión.</a:t>
             </a:r>
           </a:p>
         </p:txBody>
       </p:sp>
       <p:sp>
         <p:nvSpPr>
-          <p:cNvPr id="5" name="TextBox 4"/>
+          <p:cNvPr id="6" name="TextBox 5"/>
           <p:cNvSpPr txBox="1"/>
           <p:nvPr/>
         </p:nvSpPr>
@@ -11659,7 +11751,7 @@
                 </a:solidFill>
                 <a:latin typeface="Calibri"/>
               </a:rPr>
-              <a:t>TALLER — Validar por dentro y por fuera (25 minutos) (cont.)</a:t>
+              <a:t>TALLER · cómo se revisa y dónde se entrega</a:t>
             </a:r>
           </a:p>
         </p:txBody>
@@ -11672,8 +11764,8 @@
         </p:nvSpPr>
         <p:spPr>
           <a:xfrm>
-            <a:off x="640080" y="1691639"/>
-            <a:ext cx="10911535" cy="4617720"/>
+            <a:off x="640080" y="1280160"/>
+            <a:ext cx="10911535" cy="411480"/>
           </a:xfrm>
           <a:prstGeom prst="rect">
             <a:avLst/>
@@ -11686,6 +11778,41 @@
           </a:bodyPr>
           <a:lstStyle/>
           <a:p>
+            <a:pPr algn="ctr"/>
+            <a:r>
+              <a:rPr sz="1500" b="0" i="0">
+                <a:solidFill>
+                  <a:srgbClr val="2B2B2B"/>
+                </a:solidFill>
+                <a:latin typeface="Calibri"/>
+              </a:rPr>
+              <a:t>Validar por dentro y por fuera</a:t>
+            </a:r>
+          </a:p>
+        </p:txBody>
+      </p:sp>
+      <p:sp>
+        <p:nvSpPr>
+          <p:cNvPr id="5" name="TextBox 4"/>
+          <p:cNvSpPr txBox="1"/>
+          <p:nvPr/>
+        </p:nvSpPr>
+        <p:spPr>
+          <a:xfrm>
+            <a:off x="640080" y="2011679"/>
+            <a:ext cx="10911535" cy="4297680"/>
+          </a:xfrm>
+          <a:prstGeom prst="rect">
+            <a:avLst/>
+          </a:prstGeom>
+          <a:noFill/>
+        </p:spPr>
+        <p:txBody>
+          <a:bodyPr wrap="square" anchor="t" lIns="0" rIns="0" tIns="0" bIns="0">
+            <a:spAutoFit/>
+          </a:bodyPr>
+          <a:lstStyle/>
+          <a:p>
             <a:pPr>
               <a:spcAft>
                 <a:spcPts val="1000"/>
@@ -11707,7 +11834,7 @@
                 </a:solidFill>
                 <a:latin typeface="Calibri"/>
               </a:rPr>
-              <a:t>Criterio de éxito verificable:</a:t>
+              <a:t>Quedó bien si</a:t>
             </a:r>
             <a:r>
               <a:rPr sz="1600" b="0" i="0">
@@ -11716,7 +11843,143 @@
                 </a:solidFill>
                 <a:latin typeface="Calibri"/>
               </a:rPr>
-              <a:t> una prueba con criterio que </a:t>
+              <a:t> —compruébelo usted antes de cerrar el documento—:</a:t>
+            </a:r>
+          </a:p>
+          <a:p>
+            <a:pPr lvl="1">
+              <a:spcAft>
+                <a:spcPts val="600"/>
+              </a:spcAft>
+            </a:pPr>
+            <a:r>
+              <a:rPr sz="1500" b="0" i="0">
+                <a:solidFill>
+                  <a:srgbClr val="2B2B2B"/>
+                </a:solidFill>
+                <a:latin typeface="Calibri"/>
+              </a:rPr>
+              <a:t>●   La prueba tiene un criterio que </a:t>
+            </a:r>
+            <a:r>
+              <a:rPr sz="1500" b="1" i="0">
+                <a:solidFill>
+                  <a:srgbClr val="2B2B2B"/>
+                </a:solidFill>
+                <a:latin typeface="Calibri"/>
+              </a:rPr>
+              <a:t>se puede medir hoy mismo</a:t>
+            </a:r>
+            <a:r>
+              <a:rPr sz="1500" b="0" i="0">
+                <a:solidFill>
+                  <a:srgbClr val="2B2B2B"/>
+                </a:solidFill>
+                <a:latin typeface="Calibri"/>
+              </a:rPr>
+              <a:t> y </a:t>
+            </a:r>
+            <a:r>
+              <a:rPr sz="1500" b="1" i="0">
+                <a:solidFill>
+                  <a:srgbClr val="2B2B2B"/>
+                </a:solidFill>
+                <a:latin typeface="Calibri"/>
+              </a:rPr>
+              <a:t>podría fallar</a:t>
+            </a:r>
+            <a:r>
+              <a:rPr sz="1500" b="0" i="0">
+                <a:solidFill>
+                  <a:srgbClr val="2B2B2B"/>
+                </a:solidFill>
+                <a:latin typeface="Calibri"/>
+              </a:rPr>
+              <a:t>.</a:t>
+            </a:r>
+          </a:p>
+          <a:p>
+            <a:pPr lvl="1">
+              <a:spcAft>
+                <a:spcPts val="600"/>
+              </a:spcAft>
+            </a:pPr>
+            <a:r>
+              <a:rPr sz="1500" b="0" i="0">
+                <a:solidFill>
+                  <a:srgbClr val="2B2B2B"/>
+                </a:solidFill>
+                <a:latin typeface="Calibri"/>
+              </a:rPr>
+              <a:t>●   Las 2 señales traen </a:t>
+            </a:r>
+            <a:r>
+              <a:rPr sz="1500" b="1" i="0">
+                <a:solidFill>
+                  <a:srgbClr val="2B2B2B"/>
+                </a:solidFill>
+                <a:latin typeface="Calibri"/>
+              </a:rPr>
+              <a:t>fuente y fecha</a:t>
+            </a:r>
+            <a:r>
+              <a:rPr sz="1500" b="0" i="0">
+                <a:solidFill>
+                  <a:srgbClr val="2B2B2B"/>
+                </a:solidFill>
+                <a:latin typeface="Calibri"/>
+              </a:rPr>
+              <a:t> y son de frentes distintos, no las dos tecnológicas.</a:t>
+            </a:r>
+          </a:p>
+          <a:p>
+            <a:pPr lvl="1">
+              <a:spcAft>
+                <a:spcPts val="600"/>
+              </a:spcAft>
+            </a:pPr>
+            <a:r>
+              <a:rPr sz="1500" b="0" i="0">
+                <a:solidFill>
+                  <a:srgbClr val="2B2B2B"/>
+                </a:solidFill>
+                <a:latin typeface="Calibri"/>
+              </a:rPr>
+              <a:t>●   Las señales produjeron </a:t>
+            </a:r>
+            <a:r>
+              <a:rPr sz="1500" b="1" i="0">
+                <a:solidFill>
+                  <a:srgbClr val="2B2B2B"/>
+                </a:solidFill>
+                <a:latin typeface="Calibri"/>
+              </a:rPr>
+              <a:t>1 decisión</a:t>
+            </a:r>
+            <a:r>
+              <a:rPr sz="1500" b="0" i="0">
+                <a:solidFill>
+                  <a:srgbClr val="2B2B2B"/>
+                </a:solidFill>
+                <a:latin typeface="Calibri"/>
+              </a:rPr>
+              <a:t> escrita.</a:t>
+            </a:r>
+          </a:p>
+          <a:p>
+            <a:pPr>
+              <a:spcAft>
+                <a:spcPts val="1000"/>
+              </a:spcAft>
+            </a:pPr>
+            <a:r>
+              <a:rPr sz="1600" b="0" i="0">
+                <a:solidFill>
+                  <a:srgbClr val="2B2B2B"/>
+                </a:solidFill>
+                <a:latin typeface="Calibri"/>
+              </a:rPr>
+              <a:t>–   </a:t>
             </a:r>
             <a:r>
               <a:rPr sz="1600" b="1" i="0">
@@ -11725,7 +11988,7 @@
                 </a:solidFill>
                 <a:latin typeface="Calibri"/>
               </a:rPr>
-              <a:t>se puede medir hoy mismo y podría fallar</a:t>
+              <a:t>Plan B:</a:t>
             </a:r>
             <a:r>
               <a:rPr sz="1600" b="0" i="0">
@@ -11734,7 +11997,23 @@
                 </a:solidFill>
                 <a:latin typeface="Calibri"/>
               </a:rPr>
-              <a:t>, y </a:t>
+              <a:t> Si se pierde llenando los nueve bloques del Canvas, deténgase: hoy solo cuatro. Y si una ficha no cambia ni confirma nada, bórrela —ocupa el lugar de una que sí decide—.</a:t>
+            </a:r>
+          </a:p>
+          <a:p>
+            <a:pPr>
+              <a:spcAft>
+                <a:spcPts val="1000"/>
+              </a:spcAft>
+            </a:pPr>
+            <a:r>
+              <a:rPr sz="1600" b="0" i="0">
+                <a:solidFill>
+                  <a:srgbClr val="2B2B2B"/>
+                </a:solidFill>
+                <a:latin typeface="Calibri"/>
+              </a:rPr>
+              <a:t>–   </a:t>
             </a:r>
             <a:r>
               <a:rPr sz="1600" b="1" i="0">
@@ -11743,7 +12022,7 @@
                 </a:solidFill>
                 <a:latin typeface="Calibri"/>
               </a:rPr>
-              <a:t>2 señales con fuente y fecha</a:t>
+              <a:t>Hoy no se sube nada al aula:</a:t>
             </a:r>
             <a:r>
               <a:rPr sz="1600" b="0" i="0">
@@ -11752,7 +12031,7 @@
                 </a:solidFill>
                 <a:latin typeface="Calibri"/>
               </a:rPr>
-              <a:t> que produjeron </a:t>
+              <a:t> guarde `S05_ValidacionVigilancia_Apellido` (Google Doc o PDF) en su Drive y tráigalo a la próxima sesión. Es un </a:t>
             </a:r>
             <a:r>
               <a:rPr sz="1600" b="1" i="0">
@@ -11761,7 +12040,7 @@
                 </a:solidFill>
                 <a:latin typeface="Calibri"/>
               </a:rPr>
-              <a:t>1 decisión</a:t>
+              <a:t>avance formativo</a:t>
             </a:r>
             <a:r>
               <a:rPr sz="1600" b="0" i="0">
@@ -11770,14 +12049,120 @@
                 </a:solidFill>
                 <a:latin typeface="Calibri"/>
               </a:rPr>
-              <a:t> escrita.</a:t>
+              <a:t>, se revisa en clase.</a:t>
+            </a:r>
+          </a:p>
+          <a:p>
+            <a:pPr>
+              <a:spcAft>
+                <a:spcPts val="1000"/>
+              </a:spcAft>
+            </a:pPr>
+            <a:r>
+              <a:rPr sz="1600" b="0" i="0">
+                <a:solidFill>
+                  <a:srgbClr val="2B2B2B"/>
+                </a:solidFill>
+                <a:latin typeface="Calibri"/>
+              </a:rPr>
+              <a:t>–   </a:t>
+            </a:r>
+            <a:r>
+              <a:rPr sz="1600" b="1" i="0">
+                <a:solidFill>
+                  <a:srgbClr val="2B2B2B"/>
+                </a:solidFill>
+                <a:latin typeface="Calibri"/>
+              </a:rPr>
+              <a:t>Esto alimenta:</a:t>
+            </a:r>
+            <a:r>
+              <a:rPr sz="1600" b="0" i="0">
+                <a:solidFill>
+                  <a:srgbClr val="2B2B2B"/>
+                </a:solidFill>
+                <a:latin typeface="Calibri"/>
+              </a:rPr>
+              <a:t> </a:t>
+            </a:r>
+            <a:r>
+              <a:rPr sz="1600" b="1" i="0">
+                <a:solidFill>
+                  <a:srgbClr val="2B2B2B"/>
+                </a:solidFill>
+                <a:latin typeface="Calibri"/>
+              </a:rPr>
+              <a:t>ACA Final</a:t>
+            </a:r>
+            <a:r>
+              <a:rPr sz="1600" b="0" i="0">
+                <a:solidFill>
+                  <a:srgbClr val="2B2B2B"/>
+                </a:solidFill>
+                <a:latin typeface="Calibri"/>
+              </a:rPr>
+              <a:t> —tarea, 32,8%—, el documento que </a:t>
+            </a:r>
+            <a:r>
+              <a:rPr sz="1600" b="1" i="0">
+                <a:solidFill>
+                  <a:srgbClr val="2B2B2B"/>
+                </a:solidFill>
+                <a:latin typeface="Calibri"/>
+              </a:rPr>
+              <a:t>sí</a:t>
+            </a:r>
+            <a:r>
+              <a:rPr sz="1600" b="0" i="0">
+                <a:solidFill>
+                  <a:srgbClr val="2B2B2B"/>
+                </a:solidFill>
+                <a:latin typeface="Calibri"/>
+              </a:rPr>
+              <a:t> recibe </a:t>
+            </a:r>
+            <a:r>
+              <a:rPr sz="1600" b="1" i="0">
+                <a:solidFill>
+                  <a:srgbClr val="2B2B2B"/>
+                </a:solidFill>
+                <a:latin typeface="Calibri"/>
+              </a:rPr>
+              <a:t>CDigital</a:t>
+            </a:r>
+            <a:r>
+              <a:rPr sz="1600" b="0" i="0">
+                <a:solidFill>
+                  <a:srgbClr val="2B2B2B"/>
+                </a:solidFill>
+                <a:latin typeface="Calibri"/>
+              </a:rPr>
+              <a:t>; cierra en la semana de la </a:t>
+            </a:r>
+            <a:r>
+              <a:rPr sz="1600" b="1" i="0">
+                <a:solidFill>
+                  <a:srgbClr val="2B2B2B"/>
+                </a:solidFill>
+                <a:latin typeface="Calibri"/>
+              </a:rPr>
+              <a:t>Sesión 06</a:t>
+            </a:r>
+            <a:r>
+              <a:rPr sz="1600" b="0" i="0">
+                <a:solidFill>
+                  <a:srgbClr val="2B2B2B"/>
+                </a:solidFill>
+                <a:latin typeface="Calibri"/>
+              </a:rPr>
+              <a:t>.</a:t>
             </a:r>
           </a:p>
         </p:txBody>
       </p:sp>
       <p:sp>
         <p:nvSpPr>
-          <p:cNvPr id="5" name="TextBox 4"/>
+          <p:cNvPr id="6" name="TextBox 5"/>
           <p:cNvSpPr txBox="1"/>
           <p:nvPr/>
         </p:nvSpPr>
@@ -11806,40 +12191,6 @@
                 <a:latin typeface="Calibri"/>
               </a:rPr>
               <a:t>22</a:t>
-            </a:r>
-          </a:p>
-        </p:txBody>
-      </p:sp>
-      <p:sp>
-        <p:nvSpPr>
-          <p:cNvPr id="6" name="TextBox 5"/>
-          <p:cNvSpPr txBox="1"/>
-          <p:nvPr/>
-        </p:nvSpPr>
-        <p:spPr>
-          <a:xfrm>
-            <a:off x="640080" y="5943600"/>
-            <a:ext cx="9997135" cy="457200"/>
-          </a:xfrm>
-          <a:prstGeom prst="rect">
-            <a:avLst/>
-          </a:prstGeom>
-          <a:noFill/>
-        </p:spPr>
-        <p:txBody>
-          <a:bodyPr wrap="square" anchor="t" lIns="0" rIns="0" tIns="0" bIns="0">
-            <a:spAutoFit/>
-          </a:bodyPr>
-          <a:lstStyle/>
-          <a:p>
-            <a:r>
-              <a:rPr sz="1200" b="0" i="1">
-                <a:solidFill>
-                  <a:srgbClr val="2B2B2B"/>
-                </a:solidFill>
-                <a:latin typeface="Calibri"/>
-              </a:rPr>
-              <a:t>Si se pierde llenando los nueve bloques del Canvas, deténgase: hoy solo cuatro. Si una ficha no cambia ni confirma nada, bórrela: ocupa el lugar de una que sí decide.</a:t>
             </a:r>
           </a:p>
         </p:txBody>
@@ -13206,7 +13557,7 @@
                 </a:solidFill>
                 <a:latin typeface="Calibri"/>
               </a:rPr>
-              <a:t>: [URL CDigital — campus del curso pendiente]</a:t>
+              <a:t>: https://cdigital.cun.edu.co/course/view.php?id=115463</a:t>
             </a:r>
           </a:p>
           <a:p>
@@ -13840,6 +14191,1214 @@
 </file>
 
 <file path=ppt/slides/slide27.xml><?xml version="1.0" encoding="utf-8"?>
+<p:sld xmlns:a="http://schemas.openxmlformats.org/drawingml/2006/main" xmlns:p="http://schemas.openxmlformats.org/presentationml/2006/main" xmlns:r="http://schemas.openxmlformats.org/officeDocument/2006/relationships">
+  <p:cSld>
+    <p:bg>
+      <p:bgPr>
+        <a:solidFill>
+          <a:srgbClr val="FFFFFF"/>
+        </a:solidFill>
+        <a:effectLst/>
+      </p:bgPr>
+    </p:bg>
+    <p:spTree>
+      <p:nvGrpSpPr>
+        <p:cNvPr id="1" name=""/>
+        <p:cNvGrpSpPr/>
+        <p:nvPr/>
+      </p:nvGrpSpPr>
+      <p:grpSpPr/>
+      <p:sp>
+        <p:nvSpPr>
+          <p:cNvPr id="2" name="Rectangle 1"/>
+          <p:cNvSpPr/>
+          <p:nvPr/>
+        </p:nvSpPr>
+        <p:spPr>
+          <a:xfrm>
+            <a:off x="0" y="0"/>
+            <a:ext cx="12191695" cy="1188720"/>
+          </a:xfrm>
+          <a:prstGeom prst="rect">
+            <a:avLst/>
+          </a:prstGeom>
+          <a:solidFill>
+            <a:srgbClr val="0C2340"/>
+          </a:solidFill>
+          <a:ln>
+            <a:noFill/>
+          </a:ln>
+          <a:effectLst/>
+        </p:spPr>
+        <p:style>
+          <a:lnRef idx="1">
+            <a:schemeClr val="accent1"/>
+          </a:lnRef>
+          <a:fillRef idx="3">
+            <a:schemeClr val="accent1"/>
+          </a:fillRef>
+          <a:effectRef idx="2">
+            <a:schemeClr val="accent1"/>
+          </a:effectRef>
+          <a:fontRef idx="minor">
+            <a:schemeClr val="lt1"/>
+          </a:fontRef>
+        </p:style>
+        <p:txBody>
+          <a:bodyPr rtlCol="0" anchor="ctr"/>
+          <a:lstStyle/>
+          <a:p>
+            <a:pPr algn="ctr"/>
+          </a:p>
+        </p:txBody>
+      </p:sp>
+      <p:sp>
+        <p:nvSpPr>
+          <p:cNvPr id="3" name="TextBox 2"/>
+          <p:cNvSpPr txBox="1"/>
+          <p:nvPr/>
+        </p:nvSpPr>
+        <p:spPr>
+          <a:xfrm>
+            <a:off x="640080" y="0"/>
+            <a:ext cx="9082735" cy="1188720"/>
+          </a:xfrm>
+          <a:prstGeom prst="rect">
+            <a:avLst/>
+          </a:prstGeom>
+          <a:noFill/>
+        </p:spPr>
+        <p:txBody>
+          <a:bodyPr wrap="square" anchor="ctr" lIns="0" rIns="0" tIns="0" bIns="0">
+            <a:spAutoFit/>
+          </a:bodyPr>
+          <a:lstStyle/>
+          <a:p>
+            <a:pPr algn="ctr"/>
+            <a:r>
+              <a:rPr sz="2600" b="1" i="0">
+                <a:solidFill>
+                  <a:srgbClr val="FFFFFF"/>
+                </a:solidFill>
+                <a:latin typeface="Calibri"/>
+              </a:rPr>
+              <a:t>RUTA DE ENTREGABLES DEL CURSO</a:t>
+            </a:r>
+          </a:p>
+        </p:txBody>
+      </p:sp>
+      <p:sp>
+        <p:nvSpPr>
+          <p:cNvPr id="4" name="TextBox 3"/>
+          <p:cNvSpPr txBox="1"/>
+          <p:nvPr/>
+        </p:nvSpPr>
+        <p:spPr>
+          <a:xfrm>
+            <a:off x="640080" y="1280160"/>
+            <a:ext cx="10911535" cy="411480"/>
+          </a:xfrm>
+          <a:prstGeom prst="rect">
+            <a:avLst/>
+          </a:prstGeom>
+          <a:noFill/>
+        </p:spPr>
+        <p:txBody>
+          <a:bodyPr wrap="square" anchor="t" lIns="0" rIns="0" tIns="0" bIns="0">
+            <a:spAutoFit/>
+          </a:bodyPr>
+          <a:lstStyle/>
+          <a:p>
+            <a:pPr algn="ctr"/>
+            <a:r>
+              <a:rPr sz="1500" b="0" i="0">
+                <a:solidFill>
+                  <a:srgbClr val="2B2B2B"/>
+                </a:solidFill>
+                <a:latin typeface="Calibri"/>
+              </a:rPr>
+              <a:t>Sin fechas a propósito: aquí va </a:t>
+            </a:r>
+            <a:r>
+              <a:rPr sz="1500" b="1" i="0">
+                <a:solidFill>
+                  <a:srgbClr val="2B2B2B"/>
+                </a:solidFill>
+                <a:latin typeface="Calibri"/>
+              </a:rPr>
+              <a:t>en qué punto del curso</a:t>
+            </a:r>
+            <a:r>
+              <a:rPr sz="1500" b="0" i="0">
+                <a:solidFill>
+                  <a:srgbClr val="2B2B2B"/>
+                </a:solidFill>
+                <a:latin typeface="Calibri"/>
+              </a:rPr>
+              <a:t> cierra cada ítem · la ventana exacta la fija CDigital</a:t>
+            </a:r>
+          </a:p>
+        </p:txBody>
+      </p:sp>
+      <p:graphicFrame>
+        <p:nvGraphicFramePr>
+          <p:cNvPr id="5" name="Table 4"/>
+          <p:cNvGraphicFramePr>
+            <a:graphicFrameLocks noGrp="1"/>
+          </p:cNvGraphicFramePr>
+          <p:nvPr/>
+        </p:nvGraphicFramePr>
+        <p:xfrm>
+          <a:off x="640080" y="2011679"/>
+          <a:ext cx="10911533" cy="4297680"/>
+        </p:xfrm>
+        <a:graphic>
+          <a:graphicData uri="http://schemas.openxmlformats.org/drawingml/2006/table">
+            <a:tbl>
+              <a:tblPr>
+                <a:tableStyleId>{2D5ABB26-0587-4C30-8999-92F81FD0307C}</a:tableStyleId>
+              </a:tblPr>
+              <a:tblGrid>
+                <a:gridCol w="2659113"/>
+                <a:gridCol w="2659113"/>
+                <a:gridCol w="5593307"/>
+              </a:tblGrid>
+              <a:tr h="477520">
+                <a:tc>
+                  <a:txBody>
+                    <a:bodyPr/>
+                    <a:lstStyle/>
+                    <a:p>
+                      <a:pPr algn="l"/>
+                      <a:r>
+                        <a:rPr sz="1300" b="1" i="0">
+                          <a:solidFill>
+                            <a:srgbClr val="FFFFFF"/>
+                          </a:solidFill>
+                          <a:latin typeface="Calibri"/>
+                        </a:rPr>
+                        <a:t>Cierra en la semana de…</a:t>
+                      </a:r>
+                    </a:p>
+                  </a:txBody>
+                  <a:tcPr anchor="ctr" marL="109728" marR="91440" marT="36576" marB="36576">
+                    <a:solidFill>
+                      <a:srgbClr val="0C2340"/>
+                    </a:solidFill>
+                  </a:tcPr>
+                </a:tc>
+                <a:tc>
+                  <a:txBody>
+                    <a:bodyPr/>
+                    <a:lstStyle/>
+                    <a:p>
+                      <a:pPr algn="l"/>
+                      <a:r>
+                        <a:rPr sz="1300" b="1" i="0">
+                          <a:solidFill>
+                            <a:srgbClr val="FFFFFF"/>
+                          </a:solidFill>
+                          <a:latin typeface="Calibri"/>
+                        </a:rPr>
+                        <a:t>Entregable</a:t>
+                      </a:r>
+                    </a:p>
+                  </a:txBody>
+                  <a:tcPr anchor="ctr" marL="109728" marR="91440" marT="36576" marB="36576">
+                    <a:solidFill>
+                      <a:srgbClr val="0C2340"/>
+                    </a:solidFill>
+                  </a:tcPr>
+                </a:tc>
+                <a:tc>
+                  <a:txBody>
+                    <a:bodyPr/>
+                    <a:lstStyle/>
+                    <a:p>
+                      <a:pPr algn="l"/>
+                      <a:r>
+                        <a:rPr sz="1300" b="1" i="0">
+                          <a:solidFill>
+                            <a:srgbClr val="FFFFFF"/>
+                          </a:solidFill>
+                          <a:latin typeface="Calibri"/>
+                        </a:rPr>
+                        <a:t>Qué debes tener listo</a:t>
+                      </a:r>
+                    </a:p>
+                  </a:txBody>
+                  <a:tcPr anchor="ctr" marL="109728" marR="91440" marT="36576" marB="36576">
+                    <a:solidFill>
+                      <a:srgbClr val="0C2340"/>
+                    </a:solidFill>
+                  </a:tcPr>
+                </a:tc>
+              </a:tr>
+              <a:tr h="477520">
+                <a:tc>
+                  <a:txBody>
+                    <a:bodyPr/>
+                    <a:lstStyle/>
+                    <a:p>
+                      <a:pPr algn="l"/>
+                      <a:r>
+                        <a:rPr sz="1100" b="1" i="0">
+                          <a:solidFill>
+                            <a:srgbClr val="2B2B2B"/>
+                          </a:solidFill>
+                          <a:latin typeface="Calibri"/>
+                        </a:rPr>
+                        <a:t>Sesión 02</a:t>
+                      </a:r>
+                      <a:r>
+                        <a:rPr sz="1100" b="0" i="0">
+                          <a:solidFill>
+                            <a:srgbClr val="2B2B2B"/>
+                          </a:solidFill>
+                          <a:latin typeface="Calibri"/>
+                        </a:rPr>
+                        <a:t> · ya cerró</a:t>
+                      </a:r>
+                    </a:p>
+                  </a:txBody>
+                  <a:tcPr anchor="ctr" marL="109728" marR="91440" marT="36576" marB="36576">
+                    <a:solidFill>
+                      <a:srgbClr val="FFFFFF"/>
+                    </a:solidFill>
+                  </a:tcPr>
+                </a:tc>
+                <a:tc>
+                  <a:txBody>
+                    <a:bodyPr/>
+                    <a:lstStyle/>
+                    <a:p>
+                      <a:pPr algn="l"/>
+                      <a:r>
+                        <a:rPr sz="1100" b="1" i="0">
+                          <a:solidFill>
+                            <a:srgbClr val="2B2B2B"/>
+                          </a:solidFill>
+                          <a:latin typeface="Calibri"/>
+                        </a:rPr>
+                        <a:t>Quiz 1</a:t>
+                      </a:r>
+                      <a:r>
+                        <a:rPr sz="1100" b="0" i="0">
+                          <a:solidFill>
+                            <a:srgbClr val="2B2B2B"/>
+                          </a:solidFill>
+                          <a:latin typeface="Calibri"/>
+                        </a:rPr>
+                        <a:t> · Cuestionario · 6%</a:t>
+                      </a:r>
+                    </a:p>
+                  </a:txBody>
+                  <a:tcPr anchor="ctr" marL="109728" marR="91440" marT="36576" marB="36576">
+                    <a:solidFill>
+                      <a:srgbClr val="FFFFFF"/>
+                    </a:solidFill>
+                  </a:tcPr>
+                </a:tc>
+                <a:tc>
+                  <a:txBody>
+                    <a:bodyPr/>
+                    <a:lstStyle/>
+                    <a:p>
+                      <a:pPr algn="l"/>
+                      <a:r>
+                        <a:rPr sz="1100" b="0" i="0">
+                          <a:solidFill>
+                            <a:srgbClr val="2B2B2B"/>
+                          </a:solidFill>
+                          <a:latin typeface="Calibri"/>
+                        </a:rPr>
+                        <a:t>Ten leída la unidad del encuadre: </a:t>
+                      </a:r>
+                      <a:r>
+                        <a:rPr sz="1100" b="1" i="0">
+                          <a:solidFill>
+                            <a:srgbClr val="2B2B2B"/>
+                          </a:solidFill>
+                          <a:latin typeface="Calibri"/>
+                        </a:rPr>
+                        <a:t>Propuesta de Innovación</a:t>
+                      </a:r>
+                      <a:r>
+                        <a:rPr sz="1100" b="0" i="0">
+                          <a:solidFill>
+                            <a:srgbClr val="2B2B2B"/>
+                          </a:solidFill>
+                          <a:latin typeface="Calibri"/>
+                        </a:rPr>
+                        <a:t> e inteligencia emocional.</a:t>
+                      </a:r>
+                    </a:p>
+                  </a:txBody>
+                  <a:tcPr anchor="ctr" marL="109728" marR="91440" marT="36576" marB="36576">
+                    <a:solidFill>
+                      <a:srgbClr val="FFFFFF"/>
+                    </a:solidFill>
+                  </a:tcPr>
+                </a:tc>
+              </a:tr>
+              <a:tr h="477520">
+                <a:tc>
+                  <a:txBody>
+                    <a:bodyPr/>
+                    <a:lstStyle/>
+                    <a:p>
+                      <a:pPr algn="l"/>
+                      <a:r>
+                        <a:rPr sz="1100" b="1" i="0">
+                          <a:solidFill>
+                            <a:srgbClr val="2B2B2B"/>
+                          </a:solidFill>
+                          <a:latin typeface="Calibri"/>
+                        </a:rPr>
+                        <a:t>Sesión 03</a:t>
+                      </a:r>
+                      <a:r>
+                        <a:rPr sz="1100" b="0" i="0">
+                          <a:solidFill>
+                            <a:srgbClr val="2B2B2B"/>
+                          </a:solidFill>
+                          <a:latin typeface="Calibri"/>
+                        </a:rPr>
+                        <a:t> · ya cerró</a:t>
+                      </a:r>
+                    </a:p>
+                  </a:txBody>
+                  <a:tcPr anchor="ctr" marL="109728" marR="91440" marT="36576" marB="36576">
+                    <a:solidFill>
+                      <a:srgbClr val="F2F2F2"/>
+                    </a:solidFill>
+                  </a:tcPr>
+                </a:tc>
+                <a:tc>
+                  <a:txBody>
+                    <a:bodyPr/>
+                    <a:lstStyle/>
+                    <a:p>
+                      <a:pPr algn="l"/>
+                      <a:r>
+                        <a:rPr sz="1100" b="1" i="0">
+                          <a:solidFill>
+                            <a:srgbClr val="2B2B2B"/>
+                          </a:solidFill>
+                          <a:latin typeface="Calibri"/>
+                        </a:rPr>
+                        <a:t>Parcial 1</a:t>
+                      </a:r>
+                      <a:r>
+                        <a:rPr sz="1100" b="0" i="0">
+                          <a:solidFill>
+                            <a:srgbClr val="2B2B2B"/>
+                          </a:solidFill>
+                          <a:latin typeface="Calibri"/>
+                        </a:rPr>
+                        <a:t> · Cuestionario · 24%</a:t>
+                      </a:r>
+                    </a:p>
+                  </a:txBody>
+                  <a:tcPr anchor="ctr" marL="109728" marR="91440" marT="36576" marB="36576">
+                    <a:solidFill>
+                      <a:srgbClr val="F2F2F2"/>
+                    </a:solidFill>
+                  </a:tcPr>
+                </a:tc>
+                <a:tc>
+                  <a:txBody>
+                    <a:bodyPr/>
+                    <a:lstStyle/>
+                    <a:p>
+                      <a:pPr algn="l"/>
+                      <a:r>
+                        <a:rPr sz="1100" b="0" i="0">
+                          <a:solidFill>
+                            <a:srgbClr val="2B2B2B"/>
+                          </a:solidFill>
+                          <a:latin typeface="Calibri"/>
+                        </a:rPr>
+                        <a:t>Domina </a:t>
+                      </a:r>
+                      <a:r>
+                        <a:rPr sz="1100" b="1" i="0">
+                          <a:solidFill>
+                            <a:srgbClr val="2B2B2B"/>
+                          </a:solidFill>
+                          <a:latin typeface="Calibri"/>
+                        </a:rPr>
+                        <a:t>Design Thinking</a:t>
+                      </a:r>
+                      <a:r>
+                        <a:rPr sz="1100" b="0" i="0">
+                          <a:solidFill>
+                            <a:srgbClr val="2B2B2B"/>
+                          </a:solidFill>
+                          <a:latin typeface="Calibri"/>
+                        </a:rPr>
+                        <a:t>, dos técnicas de ideación, bloqueadores y ensanchadores.</a:t>
+                      </a:r>
+                    </a:p>
+                  </a:txBody>
+                  <a:tcPr anchor="ctr" marL="109728" marR="91440" marT="36576" marB="36576">
+                    <a:solidFill>
+                      <a:srgbClr val="F2F2F2"/>
+                    </a:solidFill>
+                  </a:tcPr>
+                </a:tc>
+              </a:tr>
+              <a:tr h="477520">
+                <a:tc>
+                  <a:txBody>
+                    <a:bodyPr/>
+                    <a:lstStyle/>
+                    <a:p>
+                      <a:pPr algn="l"/>
+                      <a:r>
+                        <a:rPr sz="1100" b="1" i="0">
+                          <a:solidFill>
+                            <a:srgbClr val="2B2B2B"/>
+                          </a:solidFill>
+                          <a:latin typeface="Calibri"/>
+                        </a:rPr>
+                        <a:t>Sesión 04</a:t>
+                      </a:r>
+                      <a:r>
+                        <a:rPr sz="1100" b="0" i="0">
+                          <a:solidFill>
+                            <a:srgbClr val="2B2B2B"/>
+                          </a:solidFill>
+                          <a:latin typeface="Calibri"/>
+                        </a:rPr>
+                        <a:t> · ya cerró</a:t>
+                      </a:r>
+                    </a:p>
+                  </a:txBody>
+                  <a:tcPr anchor="ctr" marL="109728" marR="91440" marT="36576" marB="36576">
+                    <a:solidFill>
+                      <a:srgbClr val="FFFFFF"/>
+                    </a:solidFill>
+                  </a:tcPr>
+                </a:tc>
+                <a:tc>
+                  <a:txBody>
+                    <a:bodyPr/>
+                    <a:lstStyle/>
+                    <a:p>
+                      <a:pPr algn="l"/>
+                      <a:r>
+                        <a:rPr sz="1100" b="1" i="0">
+                          <a:solidFill>
+                            <a:srgbClr val="2B2B2B"/>
+                          </a:solidFill>
+                          <a:latin typeface="Calibri"/>
+                        </a:rPr>
+                        <a:t>Quiz 2</a:t>
+                      </a:r>
+                      <a:r>
+                        <a:rPr sz="1100" b="0" i="0">
+                          <a:solidFill>
+                            <a:srgbClr val="2B2B2B"/>
+                          </a:solidFill>
+                          <a:latin typeface="Calibri"/>
+                        </a:rPr>
+                        <a:t> · Cuestionario · 9%</a:t>
+                      </a:r>
+                    </a:p>
+                  </a:txBody>
+                  <a:tcPr anchor="ctr" marL="109728" marR="91440" marT="36576" marB="36576">
+                    <a:solidFill>
+                      <a:srgbClr val="FFFFFF"/>
+                    </a:solidFill>
+                  </a:tcPr>
+                </a:tc>
+                <a:tc>
+                  <a:txBody>
+                    <a:bodyPr/>
+                    <a:lstStyle/>
+                    <a:p>
+                      <a:pPr algn="l"/>
+                      <a:r>
+                        <a:rPr sz="1100" b="0" i="0">
+                          <a:solidFill>
+                            <a:srgbClr val="2B2B2B"/>
+                          </a:solidFill>
+                          <a:latin typeface="Calibri"/>
+                        </a:rPr>
+                        <a:t>Suma el </a:t>
+                      </a:r>
+                      <a:r>
+                        <a:rPr sz="1100" b="1" i="0">
+                          <a:solidFill>
+                            <a:srgbClr val="2B2B2B"/>
+                          </a:solidFill>
+                          <a:latin typeface="Calibri"/>
+                        </a:rPr>
+                        <a:t>Manual de Oslo</a:t>
+                      </a:r>
+                      <a:r>
+                        <a:rPr sz="1100" b="0" i="0">
+                          <a:solidFill>
+                            <a:srgbClr val="2B2B2B"/>
+                          </a:solidFill>
+                          <a:latin typeface="Calibri"/>
+                        </a:rPr>
+                        <a:t>: qué cuenta como innovación y cómo se gestiona; el curso acumula.</a:t>
+                      </a:r>
+                    </a:p>
+                  </a:txBody>
+                  <a:tcPr anchor="ctr" marL="109728" marR="91440" marT="36576" marB="36576">
+                    <a:solidFill>
+                      <a:srgbClr val="FFFFFF"/>
+                    </a:solidFill>
+                  </a:tcPr>
+                </a:tc>
+              </a:tr>
+              <a:tr h="477520">
+                <a:tc>
+                  <a:txBody>
+                    <a:bodyPr/>
+                    <a:lstStyle/>
+                    <a:p>
+                      <a:pPr algn="l"/>
+                      <a:r>
+                        <a:rPr sz="1100" b="1" i="0">
+                          <a:solidFill>
+                            <a:srgbClr val="2B2B2B"/>
+                          </a:solidFill>
+                          <a:latin typeface="Calibri"/>
+                        </a:rPr>
+                        <a:t>Sesión 05</a:t>
+                      </a:r>
+                      <a:r>
+                        <a:rPr sz="1100" b="0" i="0">
+                          <a:solidFill>
+                            <a:srgbClr val="2B2B2B"/>
+                          </a:solidFill>
+                          <a:latin typeface="Calibri"/>
+                        </a:rPr>
+                        <a:t> · cierra esta semana</a:t>
+                      </a:r>
+                    </a:p>
+                  </a:txBody>
+                  <a:tcPr anchor="ctr" marL="109728" marR="91440" marT="36576" marB="36576">
+                    <a:solidFill>
+                      <a:srgbClr val="F2F2F2"/>
+                    </a:solidFill>
+                  </a:tcPr>
+                </a:tc>
+                <a:tc>
+                  <a:txBody>
+                    <a:bodyPr/>
+                    <a:lstStyle/>
+                    <a:p>
+                      <a:pPr algn="l"/>
+                      <a:r>
+                        <a:rPr sz="1100" b="1" i="0">
+                          <a:solidFill>
+                            <a:srgbClr val="2B2B2B"/>
+                          </a:solidFill>
+                          <a:latin typeface="Calibri"/>
+                        </a:rPr>
+                        <a:t>Parcial 2</a:t>
+                      </a:r>
+                      <a:r>
+                        <a:rPr sz="1100" b="0" i="0">
+                          <a:solidFill>
+                            <a:srgbClr val="2B2B2B"/>
+                          </a:solidFill>
+                          <a:latin typeface="Calibri"/>
+                        </a:rPr>
+                        <a:t> · Cuestionario · 21%</a:t>
+                      </a:r>
+                    </a:p>
+                  </a:txBody>
+                  <a:tcPr anchor="ctr" marL="109728" marR="91440" marT="36576" marB="36576">
+                    <a:solidFill>
+                      <a:srgbClr val="F2F2F2"/>
+                    </a:solidFill>
+                  </a:tcPr>
+                </a:tc>
+                <a:tc>
+                  <a:txBody>
+                    <a:bodyPr/>
+                    <a:lstStyle/>
+                    <a:p>
+                      <a:pPr algn="l"/>
+                      <a:r>
+                        <a:rPr sz="1100" b="0" i="0">
+                          <a:solidFill>
+                            <a:srgbClr val="2B2B2B"/>
+                          </a:solidFill>
+                          <a:latin typeface="Calibri"/>
+                        </a:rPr>
+                        <a:t>Tipifica tu innovación (producto, proceso, organización, marketing, social) y </a:t>
+                      </a:r>
+                      <a:r>
+                        <a:rPr sz="1100" b="1" i="0">
+                          <a:solidFill>
+                            <a:srgbClr val="2B2B2B"/>
+                          </a:solidFill>
+                          <a:latin typeface="Calibri"/>
+                        </a:rPr>
+                        <a:t>justifícala</a:t>
+                      </a:r>
+                      <a:r>
+                        <a:rPr sz="1100" b="0" i="0">
+                          <a:solidFill>
+                            <a:srgbClr val="2B2B2B"/>
+                          </a:solidFill>
+                          <a:latin typeface="Calibri"/>
+                        </a:rPr>
+                        <a:t>.</a:t>
+                      </a:r>
+                    </a:p>
+                  </a:txBody>
+                  <a:tcPr anchor="ctr" marL="109728" marR="91440" marT="36576" marB="36576">
+                    <a:solidFill>
+                      <a:srgbClr val="F2F2F2"/>
+                    </a:solidFill>
+                  </a:tcPr>
+                </a:tc>
+              </a:tr>
+              <a:tr h="477520">
+                <a:tc>
+                  <a:txBody>
+                    <a:bodyPr/>
+                    <a:lstStyle/>
+                    <a:p>
+                      <a:pPr algn="l"/>
+                      <a:r>
+                        <a:rPr sz="1100" b="1" i="0">
+                          <a:solidFill>
+                            <a:srgbClr val="2B2B2B"/>
+                          </a:solidFill>
+                          <a:latin typeface="Calibri"/>
+                        </a:rPr>
+                        <a:t>Sesión 06</a:t>
+                      </a:r>
+                      <a:r>
+                        <a:rPr sz="1100" b="0" i="0">
+                          <a:solidFill>
+                            <a:srgbClr val="2B2B2B"/>
+                          </a:solidFill>
+                          <a:latin typeface="Calibri"/>
+                        </a:rPr>
+                        <a:t> · pendiente</a:t>
+                      </a:r>
+                    </a:p>
+                  </a:txBody>
+                  <a:tcPr anchor="ctr" marL="109728" marR="91440" marT="36576" marB="36576">
+                    <a:solidFill>
+                      <a:srgbClr val="FFFFFF"/>
+                    </a:solidFill>
+                  </a:tcPr>
+                </a:tc>
+                <a:tc>
+                  <a:txBody>
+                    <a:bodyPr/>
+                    <a:lstStyle/>
+                    <a:p>
+                      <a:pPr algn="l"/>
+                      <a:r>
+                        <a:rPr sz="1100" b="1" i="0">
+                          <a:solidFill>
+                            <a:srgbClr val="2B2B2B"/>
+                          </a:solidFill>
+                          <a:latin typeface="Calibri"/>
+                        </a:rPr>
+                        <a:t>ACA Final</a:t>
+                      </a:r>
+                      <a:r>
+                        <a:rPr sz="1100" b="0" i="0">
+                          <a:solidFill>
+                            <a:srgbClr val="2B2B2B"/>
+                          </a:solidFill>
+                          <a:latin typeface="Calibri"/>
+                        </a:rPr>
+                        <a:t> · Tarea · 32,8%</a:t>
+                      </a:r>
+                    </a:p>
+                  </a:txBody>
+                  <a:tcPr anchor="ctr" marL="109728" marR="91440" marT="36576" marB="36576">
+                    <a:solidFill>
+                      <a:srgbClr val="FFFFFF"/>
+                    </a:solidFill>
+                  </a:tcPr>
+                </a:tc>
+                <a:tc>
+                  <a:txBody>
+                    <a:bodyPr/>
+                    <a:lstStyle/>
+                    <a:p>
+                      <a:pPr algn="l"/>
+                      <a:r>
+                        <a:rPr sz="1100" b="0" i="0">
+                          <a:solidFill>
+                            <a:srgbClr val="2B2B2B"/>
+                          </a:solidFill>
+                          <a:latin typeface="Calibri"/>
+                        </a:rPr>
+                        <a:t>Sube la </a:t>
+                      </a:r>
+                      <a:r>
+                        <a:rPr sz="1100" b="1" i="0">
+                          <a:solidFill>
+                            <a:srgbClr val="2B2B2B"/>
+                          </a:solidFill>
+                          <a:latin typeface="Calibri"/>
+                        </a:rPr>
+                        <a:t>propuesta consolidada</a:t>
+                      </a:r>
+                      <a:r>
+                        <a:rPr sz="1100" b="0" i="0">
+                          <a:solidFill>
+                            <a:srgbClr val="2B2B2B"/>
+                          </a:solidFill>
+                          <a:latin typeface="Calibri"/>
+                        </a:rPr>
+                        <a:t>: problema, tipo Oslo, FODA, Canvas, MVP, vigilancia y pitch.</a:t>
+                      </a:r>
+                    </a:p>
+                  </a:txBody>
+                  <a:tcPr anchor="ctr" marL="109728" marR="91440" marT="36576" marB="36576">
+                    <a:solidFill>
+                      <a:srgbClr val="FFFFFF"/>
+                    </a:solidFill>
+                  </a:tcPr>
+                </a:tc>
+              </a:tr>
+              <a:tr h="477520">
+                <a:tc>
+                  <a:txBody>
+                    <a:bodyPr/>
+                    <a:lstStyle/>
+                    <a:p>
+                      <a:pPr algn="l"/>
+                      <a:r>
+                        <a:rPr sz="1100" b="1" i="0">
+                          <a:solidFill>
+                            <a:srgbClr val="2B2B2B"/>
+                          </a:solidFill>
+                          <a:latin typeface="Calibri"/>
+                        </a:rPr>
+                        <a:t>Sesión 06</a:t>
+                      </a:r>
+                      <a:r>
+                        <a:rPr sz="1100" b="0" i="0">
+                          <a:solidFill>
+                            <a:srgbClr val="2B2B2B"/>
+                          </a:solidFill>
+                          <a:latin typeface="Calibri"/>
+                        </a:rPr>
+                        <a:t> · pendiente</a:t>
+                      </a:r>
+                    </a:p>
+                  </a:txBody>
+                  <a:tcPr anchor="ctr" marL="109728" marR="91440" marT="36576" marB="36576">
+                    <a:solidFill>
+                      <a:srgbClr val="F2F2F2"/>
+                    </a:solidFill>
+                  </a:tcPr>
+                </a:tc>
+                <a:tc>
+                  <a:txBody>
+                    <a:bodyPr/>
+                    <a:lstStyle/>
+                    <a:p>
+                      <a:pPr algn="l"/>
+                      <a:r>
+                        <a:rPr sz="1100" b="1" i="0">
+                          <a:solidFill>
+                            <a:srgbClr val="2B2B2B"/>
+                          </a:solidFill>
+                          <a:latin typeface="Calibri"/>
+                        </a:rPr>
+                        <a:t>Quiz 3</a:t>
+                      </a:r>
+                      <a:r>
+                        <a:rPr sz="1100" b="0" i="0">
+                          <a:solidFill>
+                            <a:srgbClr val="2B2B2B"/>
+                          </a:solidFill>
+                          <a:latin typeface="Calibri"/>
+                        </a:rPr>
+                        <a:t> · Cuestionario · 4%</a:t>
+                      </a:r>
+                    </a:p>
+                  </a:txBody>
+                  <a:tcPr anchor="ctr" marL="109728" marR="91440" marT="36576" marB="36576">
+                    <a:solidFill>
+                      <a:srgbClr val="F2F2F2"/>
+                    </a:solidFill>
+                  </a:tcPr>
+                </a:tc>
+                <a:tc>
+                  <a:txBody>
+                    <a:bodyPr/>
+                    <a:lstStyle/>
+                    <a:p>
+                      <a:pPr algn="l"/>
+                      <a:r>
+                        <a:rPr sz="1100" b="0" i="0">
+                          <a:solidFill>
+                            <a:srgbClr val="2B2B2B"/>
+                          </a:solidFill>
+                          <a:latin typeface="Calibri"/>
+                        </a:rPr>
+                        <a:t>Ten claros </a:t>
+                      </a:r>
+                      <a:r>
+                        <a:rPr sz="1100" b="1" i="0">
+                          <a:solidFill>
+                            <a:srgbClr val="2B2B2B"/>
+                          </a:solidFill>
+                          <a:latin typeface="Calibri"/>
+                        </a:rPr>
+                        <a:t>FODA, Canvas y MVP</a:t>
+                      </a:r>
+                      <a:r>
+                        <a:rPr sz="1100" b="0" i="0">
+                          <a:solidFill>
+                            <a:srgbClr val="2B2B2B"/>
+                          </a:solidFill>
+                          <a:latin typeface="Calibri"/>
+                        </a:rPr>
+                        <a:t> (verificable) y para qué sirve la vigilancia tecnológica.</a:t>
+                      </a:r>
+                    </a:p>
+                  </a:txBody>
+                  <a:tcPr anchor="ctr" marL="109728" marR="91440" marT="36576" marB="36576">
+                    <a:solidFill>
+                      <a:srgbClr val="F2F2F2"/>
+                    </a:solidFill>
+                  </a:tcPr>
+                </a:tc>
+              </a:tr>
+              <a:tr h="477520">
+                <a:tc>
+                  <a:txBody>
+                    <a:bodyPr/>
+                    <a:lstStyle/>
+                    <a:p>
+                      <a:pPr algn="l"/>
+                      <a:r>
+                        <a:rPr sz="1100" b="1" i="0">
+                          <a:solidFill>
+                            <a:srgbClr val="2B2B2B"/>
+                          </a:solidFill>
+                          <a:latin typeface="Calibri"/>
+                        </a:rPr>
+                        <a:t>Sesión 07</a:t>
+                      </a:r>
+                      <a:r>
+                        <a:rPr sz="1100" b="0" i="0">
+                          <a:solidFill>
+                            <a:srgbClr val="2B2B2B"/>
+                          </a:solidFill>
+                          <a:latin typeface="Calibri"/>
+                        </a:rPr>
+                        <a:t> · pendiente</a:t>
+                      </a:r>
+                    </a:p>
+                  </a:txBody>
+                  <a:tcPr anchor="ctr" marL="109728" marR="91440" marT="36576" marB="36576">
+                    <a:solidFill>
+                      <a:srgbClr val="FFFFFF"/>
+                    </a:solidFill>
+                  </a:tcPr>
+                </a:tc>
+                <a:tc>
+                  <a:txBody>
+                    <a:bodyPr/>
+                    <a:lstStyle/>
+                    <a:p>
+                      <a:pPr algn="l"/>
+                      <a:r>
+                        <a:rPr sz="1100" b="1" i="0">
+                          <a:solidFill>
+                            <a:srgbClr val="2B2B2B"/>
+                          </a:solidFill>
+                          <a:latin typeface="Calibri"/>
+                        </a:rPr>
+                        <a:t>Autoevaluación</a:t>
+                      </a:r>
+                      <a:r>
+                        <a:rPr sz="1100" b="0" i="0">
+                          <a:solidFill>
+                            <a:srgbClr val="2B2B2B"/>
+                          </a:solidFill>
+                          <a:latin typeface="Calibri"/>
+                        </a:rPr>
+                        <a:t> · Cuestionario · 1,6%</a:t>
+                      </a:r>
+                    </a:p>
+                  </a:txBody>
+                  <a:tcPr anchor="ctr" marL="109728" marR="91440" marT="36576" marB="36576">
+                    <a:solidFill>
+                      <a:srgbClr val="FFFFFF"/>
+                    </a:solidFill>
+                  </a:tcPr>
+                </a:tc>
+                <a:tc>
+                  <a:txBody>
+                    <a:bodyPr/>
+                    <a:lstStyle/>
+                    <a:p>
+                      <a:pPr algn="l"/>
+                      <a:r>
+                        <a:rPr sz="1100" b="0" i="0">
+                          <a:solidFill>
+                            <a:srgbClr val="2B2B2B"/>
+                          </a:solidFill>
+                          <a:latin typeface="Calibri"/>
+                        </a:rPr>
+                        <a:t>Diligénciala tú, y solo tú, </a:t>
+                      </a:r>
+                      <a:r>
+                        <a:rPr sz="1100" b="1" i="0">
+                          <a:solidFill>
+                            <a:srgbClr val="2B2B2B"/>
+                          </a:solidFill>
+                          <a:latin typeface="Calibri"/>
+                        </a:rPr>
+                        <a:t>con honestidad</a:t>
+                      </a:r>
+                      <a:r>
+                        <a:rPr sz="1100" b="0" i="0">
+                          <a:solidFill>
+                            <a:srgbClr val="2B2B2B"/>
+                          </a:solidFill>
+                          <a:latin typeface="Calibri"/>
+                        </a:rPr>
+                        <a:t> sobre tu participación real.</a:t>
+                      </a:r>
+                    </a:p>
+                  </a:txBody>
+                  <a:tcPr anchor="ctr" marL="109728" marR="91440" marT="36576" marB="36576">
+                    <a:solidFill>
+                      <a:srgbClr val="FFFFFF"/>
+                    </a:solidFill>
+                  </a:tcPr>
+                </a:tc>
+              </a:tr>
+              <a:tr h="477520">
+                <a:tc>
+                  <a:txBody>
+                    <a:bodyPr/>
+                    <a:lstStyle/>
+                    <a:p>
+                      <a:pPr algn="l"/>
+                      <a:r>
+                        <a:rPr sz="1100" b="1" i="0">
+                          <a:solidFill>
+                            <a:srgbClr val="2B2B2B"/>
+                          </a:solidFill>
+                          <a:latin typeface="Calibri"/>
+                        </a:rPr>
+                        <a:t>Sesión 07</a:t>
+                      </a:r>
+                      <a:r>
+                        <a:rPr sz="1100" b="0" i="0">
+                          <a:solidFill>
+                            <a:srgbClr val="2B2B2B"/>
+                          </a:solidFill>
+                          <a:latin typeface="Calibri"/>
+                        </a:rPr>
+                        <a:t> · pendiente</a:t>
+                      </a:r>
+                    </a:p>
+                  </a:txBody>
+                  <a:tcPr anchor="ctr" marL="109728" marR="91440" marT="36576" marB="36576">
+                    <a:solidFill>
+                      <a:srgbClr val="F2F2F2"/>
+                    </a:solidFill>
+                  </a:tcPr>
+                </a:tc>
+                <a:tc>
+                  <a:txBody>
+                    <a:bodyPr/>
+                    <a:lstStyle/>
+                    <a:p>
+                      <a:pPr algn="l"/>
+                      <a:r>
+                        <a:rPr sz="1100" b="1" i="0">
+                          <a:solidFill>
+                            <a:srgbClr val="2B2B2B"/>
+                          </a:solidFill>
+                          <a:latin typeface="Calibri"/>
+                        </a:rPr>
+                        <a:t>Coevaluación</a:t>
+                      </a:r>
+                      <a:r>
+                        <a:rPr sz="1100" b="0" i="0">
+                          <a:solidFill>
+                            <a:srgbClr val="2B2B2B"/>
+                          </a:solidFill>
+                          <a:latin typeface="Calibri"/>
+                        </a:rPr>
+                        <a:t> · Foro · 1,6%</a:t>
+                      </a:r>
+                    </a:p>
+                  </a:txBody>
+                  <a:tcPr anchor="ctr" marL="109728" marR="91440" marT="36576" marB="36576">
+                    <a:solidFill>
+                      <a:srgbClr val="F2F2F2"/>
+                    </a:solidFill>
+                  </a:tcPr>
+                </a:tc>
+                <a:tc>
+                  <a:txBody>
+                    <a:bodyPr/>
+                    <a:lstStyle/>
+                    <a:p>
+                      <a:pPr algn="l"/>
+                      <a:r>
+                        <a:rPr sz="1100" b="1" i="0">
+                          <a:solidFill>
+                            <a:srgbClr val="2B2B2B"/>
+                          </a:solidFill>
+                          <a:latin typeface="Calibri"/>
+                        </a:rPr>
+                        <a:t>Publica</a:t>
+                      </a:r>
+                      <a:r>
+                        <a:rPr sz="1100" b="0" i="0">
+                          <a:solidFill>
+                            <a:srgbClr val="2B2B2B"/>
+                          </a:solidFill>
+                          <a:latin typeface="Calibri"/>
+                        </a:rPr>
+                        <a:t> tu aporte: valora hechos del trabajo en equipo, no a las personas.</a:t>
+                      </a:r>
+                    </a:p>
+                  </a:txBody>
+                  <a:tcPr anchor="ctr" marL="109728" marR="91440" marT="36576" marB="36576">
+                    <a:solidFill>
+                      <a:srgbClr val="F2F2F2"/>
+                    </a:solidFill>
+                  </a:tcPr>
+                </a:tc>
+              </a:tr>
+            </a:tbl>
+          </a:graphicData>
+        </a:graphic>
+      </p:graphicFrame>
+      <p:sp>
+        <p:nvSpPr>
+          <p:cNvPr id="6" name="TextBox 5"/>
+          <p:cNvSpPr txBox="1"/>
+          <p:nvPr/>
+        </p:nvSpPr>
+        <p:spPr>
+          <a:xfrm>
+            <a:off x="640080" y="6080760"/>
+            <a:ext cx="10911535" cy="548640"/>
+          </a:xfrm>
+          <a:prstGeom prst="rect">
+            <a:avLst/>
+          </a:prstGeom>
+          <a:noFill/>
+        </p:spPr>
+        <p:txBody>
+          <a:bodyPr wrap="square" anchor="t" lIns="0" rIns="0" tIns="0" bIns="0">
+            <a:spAutoFit/>
+          </a:bodyPr>
+          <a:lstStyle/>
+          <a:p>
+            <a:r>
+              <a:rPr sz="1200" b="0" i="1">
+                <a:solidFill>
+                  <a:srgbClr val="2B2B2B"/>
+                </a:solidFill>
+                <a:latin typeface="Calibri"/>
+              </a:rPr>
+              <a:t>Esta misma tabla va al final de todas las sesiones. La </a:t>
+            </a:r>
+            <a:r>
+              <a:rPr sz="1200" b="1" i="1">
+                <a:solidFill>
+                  <a:srgbClr val="2B2B2B"/>
+                </a:solidFill>
+                <a:latin typeface="Calibri"/>
+              </a:rPr>
+              <a:t>fecha</a:t>
+            </a:r>
+            <a:r>
+              <a:rPr sz="1200" b="0" i="1">
+                <a:solidFill>
+                  <a:srgbClr val="2B2B2B"/>
+                </a:solidFill>
+                <a:latin typeface="Calibri"/>
+              </a:rPr>
+              <a:t> de cada ventana está en el enunciado del ítem (`Clases/Recursos/ACAs/`) y en el aula: si el aula y cualquier otro material se contradicen, </a:t>
+            </a:r>
+            <a:r>
+              <a:rPr sz="1200" b="1" i="1">
+                <a:solidFill>
+                  <a:srgbClr val="2B2B2B"/>
+                </a:solidFill>
+                <a:latin typeface="Calibri"/>
+              </a:rPr>
+              <a:t>manda el aula</a:t>
+            </a:r>
+            <a:r>
+              <a:rPr sz="1200" b="0" i="1">
+                <a:solidFill>
+                  <a:srgbClr val="2B2B2B"/>
+                </a:solidFill>
+                <a:latin typeface="Calibri"/>
+              </a:rPr>
+              <a:t>.</a:t>
+            </a:r>
+          </a:p>
+        </p:txBody>
+      </p:sp>
+      <p:sp>
+        <p:nvSpPr>
+          <p:cNvPr id="7" name="TextBox 6"/>
+          <p:cNvSpPr txBox="1"/>
+          <p:nvPr/>
+        </p:nvSpPr>
+        <p:spPr>
+          <a:xfrm>
+            <a:off x="11094415" y="6446520"/>
+            <a:ext cx="548640" cy="274320"/>
+          </a:xfrm>
+          <a:prstGeom prst="rect">
+            <a:avLst/>
+          </a:prstGeom>
+          <a:noFill/>
+        </p:spPr>
+        <p:txBody>
+          <a:bodyPr wrap="square" anchor="t" lIns="0" rIns="0" tIns="0" bIns="0">
+            <a:spAutoFit/>
+          </a:bodyPr>
+          <a:lstStyle/>
+          <a:p>
+            <a:pPr algn="r"/>
+            <a:r>
+              <a:rPr sz="1000" b="1" i="0">
+                <a:solidFill>
+                  <a:srgbClr val="8F989D"/>
+                </a:solidFill>
+                <a:latin typeface="Calibri"/>
+              </a:rPr>
+              <a:t>27</a:t>
+            </a:r>
+          </a:p>
+        </p:txBody>
+      </p:sp>
+    </p:spTree>
+  </p:cSld>
+  <p:clrMapOvr>
+    <a:masterClrMapping/>
+  </p:clrMapOvr>
+</p:sld>
+</file>
+
+<file path=ppt/slides/slide28.xml><?xml version="1.0" encoding="utf-8"?>
 <p:sld xmlns:a="http://schemas.openxmlformats.org/drawingml/2006/main" xmlns:p="http://schemas.openxmlformats.org/presentationml/2006/main" xmlns:r="http://schemas.openxmlformats.org/officeDocument/2006/relationships">
   <p:cSld>
     <p:bg>
